--- a/submission/PayFlow-FlowState-Deck.pptx
+++ b/submission/PayFlow-FlowState-Deck.pptx
@@ -10327,7 +10327,7 @@
                 </a:solidFill>
                 <a:latin typeface="Consolas"/>
               </a:rPr>
-              <a:t>demo video — recording pending</a:t>
+              <a:t>demo video rendered — upload pending</a:t>
             </a:r>
           </a:p>
         </p:txBody>

--- a/submission/PayFlow-FlowState-Deck.pptx
+++ b/submission/PayFlow-FlowState-Deck.pptx
@@ -10327,7 +10327,7 @@
                 </a:solidFill>
                 <a:latin typeface="Consolas"/>
               </a:rPr>
-              <a:t>demo video rendered — upload pending</a:t>
+              <a:t>demo video 4:19 — unlisted upload pending</a:t>
             </a:r>
           </a:p>
         </p:txBody>
